--- a/system-design-101/vi/lessons/sd-04-029/slides/sd-04-029.pptx
+++ b/system-design-101/vi/lessons/sd-04-029/slides/sd-04-029.pptx
@@ -2784,7 +2784,7 @@
               <a:buNone/>
             </a:pPr>
             <a:r>
-              <a:rPr lang="en-US" sz="2700" dirty="0" spc="-135" kern="0">
+              <a:rPr lang="en-US" sz="2700" dirty="0" spc="-2" kern="0">
                 <a:solidFill>
                   <a:srgbClr val="14161C"/>
                 </a:solidFill>
@@ -2792,10 +2792,10 @@
                 <a:ea typeface="Be Vietnam Pro" pitchFamily="34" charset="-122"/>
                 <a:cs typeface="Be Vietnam Pro" pitchFamily="34" charset="-120"/>
               </a:rPr>
-              <a:t>Từ</a:t>
-            </a:r>
-            <a:r>
-              <a:rPr lang="en-US" sz="2700" dirty="0" spc="-3" kern="0">
+              <a:t>Giao</a:t>
+            </a:r>
+            <a:r>
+              <a:rPr lang="en-US" sz="2700" dirty="0" spc="-1" kern="0">
                 <a:solidFill>
                   <a:srgbClr val="14161C"/>
                 </a:solidFill>
@@ -2803,10 +2803,10 @@
                 <a:ea typeface="Be Vietnam Pro" pitchFamily="34" charset="-122"/>
                 <a:cs typeface="Be Vietnam Pro" pitchFamily="34" charset="-120"/>
               </a:rPr>
-              <a:t> giao</a:t>
-            </a:r>
-            <a:r>
-              <a:rPr lang="en-US" sz="2700" dirty="0" spc="-1" kern="0">
+              <a:t> dịch</a:t>
+            </a:r>
+            <a:r>
+              <a:rPr lang="en-US" sz="2700" dirty="0" spc="-14" kern="0">
                 <a:solidFill>
                   <a:srgbClr val="14161C"/>
                 </a:solidFill>
@@ -2814,21 +2814,10 @@
                 <a:ea typeface="Be Vietnam Pro" pitchFamily="34" charset="-122"/>
                 <a:cs typeface="Be Vietnam Pro" pitchFamily="34" charset="-120"/>
               </a:rPr>
-              <a:t> dịch</a:t>
-            </a:r>
-            <a:r>
-              <a:rPr lang="en-US" sz="2700" dirty="0" spc="-13" kern="0">
-                <a:solidFill>
-                  <a:srgbClr val="14161C"/>
-                </a:solidFill>
-                <a:latin typeface="Be Vietnam Pro" pitchFamily="34" charset="0"/>
-                <a:ea typeface="Be Vietnam Pro" pitchFamily="34" charset="-122"/>
-                <a:cs typeface="Be Vietnam Pro" pitchFamily="34" charset="-120"/>
-              </a:rPr>
               <a:t> tới</a:t>
             </a:r>
             <a:r>
-              <a:rPr lang="en-US" sz="2700" dirty="0" spc="-6" kern="0">
+              <a:rPr lang="en-US" sz="2700" dirty="0" spc="-5" kern="0">
                 <a:solidFill>
                   <a:srgbClr val="14161C"/>
                 </a:solidFill>
@@ -5475,7 +5464,7 @@
               <a:t> bảy</a:t>
             </a:r>
             <a:r>
-              <a:rPr lang="en-US" sz="2250" dirty="0" spc="0" kern="0">
+              <a:rPr lang="en-US" sz="2250" dirty="0" spc="-3" kern="0">
                 <a:solidFill>
                   <a:srgbClr val="9AA0B5"/>
                 </a:solidFill>
@@ -5483,10 +5472,10 @@
                 <a:ea typeface="Be Vietnam Pro" pitchFamily="34" charset="-122"/>
                 <a:cs typeface="Be Vietnam Pro" pitchFamily="34" charset="-120"/>
               </a:rPr>
-              <a:t> cột.</a:t>
-            </a:r>
-            <a:r>
-              <a:rPr lang="en-US" sz="2250" dirty="0" spc="-1" kern="0">
+              <a:t> cột,</a:t>
+            </a:r>
+            <a:r>
+              <a:rPr lang="en-US" sz="2250" dirty="0" spc="-18" kern="0">
                 <a:solidFill>
                   <a:srgbClr val="9AA0B5"/>
                 </a:solidFill>
@@ -5494,10 +5483,10 @@
                 <a:ea typeface="Be Vietnam Pro" pitchFamily="34" charset="-122"/>
                 <a:cs typeface="Be Vietnam Pro" pitchFamily="34" charset="-120"/>
               </a:rPr>
-              <a:t> Mỗi</a:t>
-            </a:r>
-            <a:r>
-              <a:rPr lang="en-US" sz="2250" dirty="0" spc="2" kern="0">
+              <a:t> trên</a:t>
+            </a:r>
+            <a:r>
+              <a:rPr lang="en-US" sz="2250" dirty="0" spc="1" kern="0">
                 <a:solidFill>
                   <a:srgbClr val="9AA0B5"/>
                 </a:solidFill>
@@ -5505,10 +5494,10 @@
                 <a:ea typeface="Be Vietnam Pro" pitchFamily="34" charset="-122"/>
                 <a:cs typeface="Be Vietnam Pro" pitchFamily="34" charset="-120"/>
               </a:rPr>
-              <a:t> dòng</a:t>
-            </a:r>
-            <a:r>
-              <a:rPr lang="en-US" sz="2250" dirty="0" spc="0" kern="0">
+              <a:t> các</a:t>
+            </a:r>
+            <a:r>
+              <a:rPr lang="en-US" sz="2250" dirty="0" spc="-16" kern="0">
                 <a:solidFill>
                   <a:srgbClr val="9AA0B5"/>
                 </a:solidFill>
@@ -5516,10 +5505,10 @@
                 <a:ea typeface="Be Vietnam Pro" pitchFamily="34" charset="-122"/>
                 <a:cs typeface="Be Vietnam Pro" pitchFamily="34" charset="-120"/>
               </a:rPr>
-              <a:t> là</a:t>
-            </a:r>
-            <a:r>
-              <a:rPr lang="en-US" sz="2250" dirty="0" spc="-4" kern="0">
+              <a:t> trang</a:t>
+            </a:r>
+            <a:r>
+              <a:rPr lang="en-US" sz="2250" dirty="0" spc="4" kern="0">
                 <a:solidFill>
                   <a:srgbClr val="9AA0B5"/>
                 </a:solidFill>
@@ -5527,54 +5516,10 @@
                 <a:ea typeface="Be Vietnam Pro" pitchFamily="34" charset="-122"/>
                 <a:cs typeface="Be Vietnam Pro" pitchFamily="34" charset="-120"/>
               </a:rPr>
-              <a:t> một</a:t>
+              <a:t> 8</a:t>
             </a:r>
             <a:r>
               <a:rPr lang="en-US" sz="2250" dirty="0" spc="3" kern="0">
-                <a:solidFill>
-                  <a:srgbClr val="9AA0B5"/>
-                </a:solidFill>
-                <a:latin typeface="Be Vietnam Pro" pitchFamily="34" charset="0"/>
-                <a:ea typeface="Be Vietnam Pro" pitchFamily="34" charset="-122"/>
-                <a:cs typeface="Be Vietnam Pro" pitchFamily="34" charset="-120"/>
-              </a:rPr>
-              <a:t> mục</a:t>
-            </a:r>
-            <a:r>
-              <a:rPr lang="en-US" sz="2250" dirty="0" spc="-19" kern="0">
-                <a:solidFill>
-                  <a:srgbClr val="9AA0B5"/>
-                </a:solidFill>
-                <a:latin typeface="Be Vietnam Pro" pitchFamily="34" charset="0"/>
-                <a:ea typeface="Be Vietnam Pro" pitchFamily="34" charset="-122"/>
-                <a:cs typeface="Be Vietnam Pro" pitchFamily="34" charset="-120"/>
-              </a:rPr>
-              <a:t> trên</a:t>
-            </a:r>
-            <a:r>
-              <a:rPr lang="en-US" sz="2250" dirty="0" spc="-16" kern="0">
-                <a:solidFill>
-                  <a:srgbClr val="9AA0B5"/>
-                </a:solidFill>
-                <a:latin typeface="Be Vietnam Pro" pitchFamily="34" charset="0"/>
-                <a:ea typeface="Be Vietnam Pro" pitchFamily="34" charset="-122"/>
-                <a:cs typeface="Be Vietnam Pro" pitchFamily="34" charset="-120"/>
-              </a:rPr>
-              <a:t> trang</a:t>
-            </a:r>
-            <a:r>
-              <a:rPr lang="en-US" sz="2250" dirty="0" spc="3" kern="0">
-                <a:solidFill>
-                  <a:srgbClr val="9AA0B5"/>
-                </a:solidFill>
-                <a:latin typeface="Be Vietnam Pro" pitchFamily="34" charset="0"/>
-                <a:ea typeface="Be Vietnam Pro" pitchFamily="34" charset="-122"/>
-                <a:cs typeface="Be Vietnam Pro" pitchFamily="34" charset="-120"/>
-              </a:rPr>
-              <a:t> 8</a:t>
-            </a:r>
-            <a:r>
-              <a:rPr lang="en-US" sz="2250" dirty="0" spc="4" kern="0">
                 <a:solidFill>
                   <a:srgbClr val="9AA0B5"/>
                 </a:solidFill>
@@ -6068,6 +6013,94 @@
               <a:buNone/>
             </a:pPr>
             <a:r>
+              <a:rPr lang="en-US" sz="2400" b="1" dirty="0" spc="-45" kern="0">
+                <a:solidFill>
+                  <a:srgbClr val="E4E1D8"/>
+                </a:solidFill>
+                <a:latin typeface="Be Vietnam Pro" pitchFamily="34" charset="0"/>
+                <a:ea typeface="Be Vietnam Pro" pitchFamily="34" charset="-122"/>
+                <a:cs typeface="Be Vietnam Pro" pitchFamily="34" charset="-120"/>
+              </a:rPr>
+              <a:t>Vẫn</a:t>
+            </a:r>
+            <a:r>
+              <a:rPr lang="en-US" sz="2400" b="1" dirty="0" spc="-7" kern="0">
+                <a:solidFill>
+                  <a:srgbClr val="E4E1D8"/>
+                </a:solidFill>
+                <a:latin typeface="Be Vietnam Pro" pitchFamily="34" charset="0"/>
+                <a:ea typeface="Be Vietnam Pro" pitchFamily="34" charset="-122"/>
+                <a:cs typeface="Be Vietnam Pro" pitchFamily="34" charset="-120"/>
+              </a:rPr>
+              <a:t> chạy; hệ</a:t>
+            </a:r>
+            <a:r>
+              <a:rPr lang="en-US" sz="2400" b="1" dirty="0" spc="32" kern="0">
+                <a:solidFill>
+                  <a:srgbClr val="E4E1D8"/>
+                </a:solidFill>
+                <a:latin typeface="Be Vietnam Pro" pitchFamily="34" charset="0"/>
+                <a:ea typeface="Be Vietnam Pro" pitchFamily="34" charset="-122"/>
+                <a:cs typeface="Be Vietnam Pro" pitchFamily="34" charset="-120"/>
+              </a:rPr>
+              <a:t> lưu</a:t>
+            </a:r>
+            <a:r>
+              <a:rPr lang="en-US" sz="2400" b="1" dirty="0" spc="-5" kern="0">
+                <a:solidFill>
+                  <a:srgbClr val="E4E1D8"/>
+                </a:solidFill>
+                <a:latin typeface="Be Vietnam Pro" pitchFamily="34" charset="0"/>
+                <a:ea typeface="Be Vietnam Pro" pitchFamily="34" charset="-122"/>
+                <a:cs typeface="Be Vietnam Pro" pitchFamily="34" charset="-120"/>
+              </a:rPr>
+              <a:t> theo</a:t>
+            </a:r>
+            <a:r>
+              <a:rPr lang="en-US" sz="2400" b="1" dirty="0" spc="-8" kern="0">
+                <a:solidFill>
+                  <a:srgbClr val="E4E1D8"/>
+                </a:solidFill>
+                <a:latin typeface="Be Vietnam Pro" pitchFamily="34" charset="0"/>
+                <a:ea typeface="Be Vietnam Pro" pitchFamily="34" charset="-122"/>
+                <a:cs typeface="Be Vietnam Pro" pitchFamily="34" charset="-120"/>
+              </a:rPr>
+              <a:t> cột</a:t>
+            </a:r>
+            <a:r>
+              <a:rPr lang="en-US" sz="2400" b="1" dirty="0" spc="-2" kern="0">
+                <a:solidFill>
+                  <a:srgbClr val="E4E1D8"/>
+                </a:solidFill>
+                <a:latin typeface="Be Vietnam Pro" pitchFamily="34" charset="0"/>
+                <a:ea typeface="Be Vietnam Pro" pitchFamily="34" charset="-122"/>
+                <a:cs typeface="Be Vietnam Pro" pitchFamily="34" charset="-120"/>
+              </a:rPr>
+              <a:t> chỉ</a:t>
+            </a:r>
+            <a:r>
+              <a:rPr lang="en-US" sz="2400" b="1" dirty="0" spc="4" kern="0">
+                <a:solidFill>
+                  <a:srgbClr val="E4E1D8"/>
+                </a:solidFill>
+                <a:latin typeface="Be Vietnam Pro" pitchFamily="34" charset="0"/>
+                <a:ea typeface="Be Vietnam Pro" pitchFamily="34" charset="-122"/>
+                <a:cs typeface="Be Vietnam Pro" pitchFamily="34" charset="-120"/>
+              </a:rPr>
+              <a:t> đọc</a:t>
+            </a:r>
+            <a:r>
+              <a:rPr lang="en-US" sz="2400" b="1" dirty="0" spc="-8" kern="0">
+                <a:solidFill>
+                  <a:srgbClr val="E4E1D8"/>
+                </a:solidFill>
+                <a:latin typeface="Be Vietnam Pro" pitchFamily="34" charset="0"/>
+                <a:ea typeface="Be Vietnam Pro" pitchFamily="34" charset="-122"/>
+                <a:cs typeface="Be Vietnam Pro" pitchFamily="34" charset="-120"/>
+              </a:rPr>
+              <a:t> cột</a:t>
+            </a:r>
+            <a:r>
               <a:rPr lang="en-US" sz="2400" b="1" dirty="0" spc="-1" kern="0">
                 <a:solidFill>
                   <a:srgbClr val="E4E1D8"/>
@@ -6076,128 +6109,7 @@
                 <a:ea typeface="Be Vietnam Pro" pitchFamily="34" charset="-122"/>
                 <a:cs typeface="Be Vietnam Pro" pitchFamily="34" charset="-120"/>
               </a:rPr>
-              <a:t>Phân tích</a:t>
-            </a:r>
-            <a:r>
-              <a:rPr lang="en-US" sz="2400" b="1" dirty="0" spc="-12" kern="0">
-                <a:solidFill>
-                  <a:srgbClr val="E4E1D8"/>
-                </a:solidFill>
-                <a:latin typeface="Be Vietnam Pro" pitchFamily="34" charset="0"/>
-                <a:ea typeface="Be Vietnam Pro" pitchFamily="34" charset="-122"/>
-                <a:cs typeface="Be Vietnam Pro" pitchFamily="34" charset="-120"/>
-              </a:rPr>
-              <a:t> vẫn</a:t>
-            </a:r>
-            <a:r>
-              <a:rPr lang="en-US" sz="2400" b="1" dirty="0" spc="-7" kern="0">
-                <a:solidFill>
-                  <a:srgbClr val="E4E1D8"/>
-                </a:solidFill>
-                <a:latin typeface="Be Vietnam Pro" pitchFamily="34" charset="0"/>
-                <a:ea typeface="Be Vietnam Pro" pitchFamily="34" charset="-122"/>
-                <a:cs typeface="Be Vietnam Pro" pitchFamily="34" charset="-120"/>
-              </a:rPr>
-              <a:t> chạy;</a:t>
-            </a:r>
-            <a:r>
-              <a:rPr lang="en-US" sz="2400" b="1" dirty="0" spc="-8" kern="0">
-                <a:solidFill>
-                  <a:srgbClr val="E4E1D8"/>
-                </a:solidFill>
-                <a:latin typeface="Be Vietnam Pro" pitchFamily="34" charset="0"/>
-                <a:ea typeface="Be Vietnam Pro" pitchFamily="34" charset="-122"/>
-                <a:cs typeface="Be Vietnam Pro" pitchFamily="34" charset="-120"/>
-              </a:rPr>
-              <a:t> hệ</a:t>
-            </a:r>
-            <a:r>
-              <a:rPr lang="en-US" sz="2400" b="1" dirty="0" spc="33" kern="0">
-                <a:solidFill>
-                  <a:srgbClr val="E4E1D8"/>
-                </a:solidFill>
-                <a:latin typeface="Be Vietnam Pro" pitchFamily="34" charset="0"/>
-                <a:ea typeface="Be Vietnam Pro" pitchFamily="34" charset="-122"/>
-                <a:cs typeface="Be Vietnam Pro" pitchFamily="34" charset="-120"/>
-              </a:rPr>
-              <a:t> lưu</a:t>
-            </a:r>
-            <a:r>
-              <a:rPr lang="en-US" sz="2400" b="1" dirty="0" spc="-6" kern="0">
-                <a:solidFill>
-                  <a:srgbClr val="E4E1D8"/>
-                </a:solidFill>
-                <a:latin typeface="Be Vietnam Pro" pitchFamily="34" charset="0"/>
-                <a:ea typeface="Be Vietnam Pro" pitchFamily="34" charset="-122"/>
-                <a:cs typeface="Be Vietnam Pro" pitchFamily="34" charset="-120"/>
-              </a:rPr>
-              <a:t> theo</a:t>
-            </a:r>
-            <a:r>
-              <a:rPr lang="en-US" sz="2400" b="1" dirty="0" spc="-8" kern="0">
-                <a:solidFill>
-                  <a:srgbClr val="E4E1D8"/>
-                </a:solidFill>
-                <a:latin typeface="Be Vietnam Pro" pitchFamily="34" charset="0"/>
-                <a:ea typeface="Be Vietnam Pro" pitchFamily="34" charset="-122"/>
-                <a:cs typeface="Be Vietnam Pro" pitchFamily="34" charset="-120"/>
-              </a:rPr>
-              <a:t> cột</a:t>
-            </a:r>
-            <a:r>
-              <a:rPr lang="en-US" sz="2400" b="1" dirty="0" spc="-1" kern="0">
-                <a:solidFill>
-                  <a:srgbClr val="E4E1D8"/>
-                </a:solidFill>
-                <a:latin typeface="Be Vietnam Pro" pitchFamily="34" charset="0"/>
-                <a:ea typeface="Be Vietnam Pro" pitchFamily="34" charset="-122"/>
-                <a:cs typeface="Be Vietnam Pro" pitchFamily="34" charset="-120"/>
-              </a:rPr>
-              <a:t> chỉ</a:t>
-            </a:r>
-            <a:r>
-              <a:rPr lang="en-US" sz="2400" b="1" dirty="0" spc="4" kern="0">
-                <a:solidFill>
-                  <a:srgbClr val="E4E1D8"/>
-                </a:solidFill>
-                <a:latin typeface="Be Vietnam Pro" pitchFamily="34" charset="0"/>
-                <a:ea typeface="Be Vietnam Pro" pitchFamily="34" charset="-122"/>
-                <a:cs typeface="Be Vietnam Pro" pitchFamily="34" charset="-120"/>
-              </a:rPr>
-              <a:t> đọc</a:t>
-            </a:r>
-            <a:r>
-              <a:rPr lang="en-US" sz="2400" b="1" dirty="0" spc="-9" kern="0">
-                <a:solidFill>
-                  <a:srgbClr val="E4E1D8"/>
-                </a:solidFill>
-                <a:latin typeface="Be Vietnam Pro" pitchFamily="34" charset="0"/>
-                <a:ea typeface="Be Vietnam Pro" pitchFamily="34" charset="-122"/>
-                <a:cs typeface="Be Vietnam Pro" pitchFamily="34" charset="-120"/>
-              </a:rPr>
-              <a:t> cột</a:t>
-            </a:r>
-            <a:r>
-              <a:rPr lang="en-US" sz="2400" b="1" dirty="0" spc="-1" kern="0">
-                <a:solidFill>
-                  <a:srgbClr val="E4E1D8"/>
-                </a:solidFill>
-                <a:latin typeface="Be Vietnam Pro" pitchFamily="34" charset="0"/>
-                <a:ea typeface="Be Vietnam Pro" pitchFamily="34" charset="-122"/>
-                <a:cs typeface="Be Vietnam Pro" pitchFamily="34" charset="-120"/>
-              </a:rPr>
-              <a:t> cần</a:t>
-            </a:r>
-            <a:r>
-              <a:rPr lang="en-US" sz="2400" b="1" dirty="0" spc="-2" kern="0">
-                <a:solidFill>
-                  <a:srgbClr val="E4E1D8"/>
-                </a:solidFill>
-                <a:latin typeface="Be Vietnam Pro" pitchFamily="34" charset="0"/>
-                <a:ea typeface="Be Vietnam Pro" pitchFamily="34" charset="-122"/>
-                <a:cs typeface="Be Vietnam Pro" pitchFamily="34" charset="-120"/>
-              </a:rPr>
-              <a:t> dùng.</a:t>
+              <a:t> cần.</a:t>
             </a:r>
             <a:endParaRPr lang="en-US" sz="2400" dirty="0"/>
           </a:p>
@@ -8841,26 +8753,15 @@
               <a:t> bật</a:t>
             </a:r>
             <a:r>
-              <a:rPr lang="en-US" sz="2850" dirty="0" spc="-9" kern="0">
-                <a:solidFill>
-                  <a:srgbClr val="F3EEE3"/>
-                </a:solidFill>
-                <a:latin typeface="Be Vietnam Pro" pitchFamily="34" charset="0"/>
-                <a:ea typeface="Be Vietnam Pro" pitchFamily="34" charset="-122"/>
-                <a:cs typeface="Be Vietnam Pro" pitchFamily="34" charset="-120"/>
-              </a:rPr>
-              <a:t> một</a:t>
-            </a:r>
-            <a:r>
-              <a:rPr lang="en-US" sz="2850" dirty="0" spc="-10" kern="0">
-                <a:solidFill>
-                  <a:srgbClr val="F3EEE3"/>
-                </a:solidFill>
-                <a:latin typeface="Be Vietnam Pro" pitchFamily="34" charset="0"/>
-                <a:ea typeface="Be Vietnam Pro" pitchFamily="34" charset="-122"/>
-                <a:cs typeface="Be Vietnam Pro" pitchFamily="34" charset="-120"/>
-              </a:rPr>
-              <a:t> số</a:t>
+              <a:rPr lang="en-US" sz="2850" dirty="0" spc="-11" kern="0">
+                <a:solidFill>
+                  <a:srgbClr val="F3EEE3"/>
+                </a:solidFill>
+                <a:latin typeface="Be Vietnam Pro" pitchFamily="34" charset="0"/>
+                <a:ea typeface="Be Vietnam Pro" pitchFamily="34" charset="-122"/>
+                <a:cs typeface="Be Vietnam Pro" pitchFamily="34" charset="-120"/>
+              </a:rPr>
+              <a:t> vài</a:t>
             </a:r>
             <a:r>
               <a:rPr lang="en-US" sz="2850" dirty="0" spc="-1" kern="0">
@@ -9990,7 +9891,7 @@
               <a:t> liệu</a:t>
             </a:r>
             <a:r>
-              <a:rPr lang="en-US" sz="2250" dirty="0" spc="2" kern="0">
+              <a:rPr lang="en-US" sz="2250" dirty="0" spc="11" kern="0">
                 <a:solidFill>
                   <a:srgbClr val="6B6A66"/>
                 </a:solidFill>
@@ -9998,65 +9899,10 @@
                 <a:ea typeface="Be Vietnam Pro" pitchFamily="34" charset="-122"/>
                 <a:cs typeface="Be Vietnam Pro" pitchFamily="34" charset="-120"/>
               </a:rPr>
-              <a:t> của</a:t>
-            </a:r>
-            <a:r>
-              <a:rPr lang="en-US" sz="2250" dirty="0" spc="-3" kern="0">
-                <a:solidFill>
-                  <a:srgbClr val="6B6A66"/>
-                </a:solidFill>
-                <a:latin typeface="Be Vietnam Pro" pitchFamily="34" charset="0"/>
-                <a:ea typeface="Be Vietnam Pro" pitchFamily="34" charset="-122"/>
-                <a:cs typeface="Be Vietnam Pro" pitchFamily="34" charset="-120"/>
-              </a:rPr>
-              <a:t> một</a:t>
-            </a:r>
-            <a:r>
-              <a:rPr lang="en-US" sz="2250" dirty="0" spc="0" kern="0">
-                <a:solidFill>
-                  <a:srgbClr val="6B6A66"/>
-                </a:solidFill>
-                <a:latin typeface="Be Vietnam Pro" pitchFamily="34" charset="0"/>
-                <a:ea typeface="Be Vietnam Pro" pitchFamily="34" charset="-122"/>
-                <a:cs typeface="Be Vietnam Pro" pitchFamily="34" charset="-120"/>
-              </a:rPr>
-              <a:t> nhà</a:t>
-            </a:r>
-            <a:r>
-              <a:rPr lang="en-US" sz="2250" dirty="0" spc="1" kern="0">
-                <a:solidFill>
-                  <a:srgbClr val="6B6A66"/>
-                </a:solidFill>
-                <a:latin typeface="Be Vietnam Pro" pitchFamily="34" charset="0"/>
-                <a:ea typeface="Be Vietnam Pro" pitchFamily="34" charset="-122"/>
-                <a:cs typeface="Be Vietnam Pro" pitchFamily="34" charset="-120"/>
-              </a:rPr>
-              <a:t> cung</a:t>
-            </a:r>
-            <a:r>
-              <a:rPr lang="en-US" sz="2250" dirty="0" spc="2" kern="0">
-                <a:solidFill>
-                  <a:srgbClr val="6B6A66"/>
-                </a:solidFill>
-                <a:latin typeface="Be Vietnam Pro" pitchFamily="34" charset="0"/>
-                <a:ea typeface="Be Vietnam Pro" pitchFamily="34" charset="-122"/>
-                <a:cs typeface="Be Vietnam Pro" pitchFamily="34" charset="-120"/>
-              </a:rPr>
-              <a:t> cấp</a:t>
-            </a:r>
-            <a:r>
-              <a:rPr lang="en-US" sz="2250" dirty="0" spc="11" kern="0">
-                <a:solidFill>
-                  <a:srgbClr val="6B6A66"/>
-                </a:solidFill>
-                <a:latin typeface="Be Vietnam Pro" pitchFamily="34" charset="0"/>
-                <a:ea typeface="Be Vietnam Pro" pitchFamily="34" charset="-122"/>
-                <a:cs typeface="Be Vietnam Pro" pitchFamily="34" charset="-120"/>
-              </a:rPr>
               <a:t> đám</a:t>
             </a:r>
             <a:r>
-              <a:rPr lang="en-US" sz="2250" dirty="0" spc="-7" kern="0">
+              <a:rPr lang="en-US" sz="2250" dirty="0" spc="-6" kern="0">
                 <a:solidFill>
                   <a:srgbClr val="6B6A66"/>
                 </a:solidFill>
@@ -11498,7 +11344,7 @@
               <a:t> cái</a:t>
             </a:r>
             <a:r>
-              <a:rPr lang="en-US" sz="7500" dirty="0" spc="-95" kern="0">
+              <a:rPr lang="en-US" sz="7500" dirty="0" spc="-2" kern="0">
                 <a:solidFill>
                   <a:srgbClr val="14161C"/>
                 </a:solidFill>
@@ -11506,10 +11352,10 @@
                 <a:ea typeface="Bricolage Grotesque ExtraBold" pitchFamily="34" charset="-122"/>
                 <a:cs typeface="Bricolage Grotesque ExtraBold" pitchFamily="34" charset="-120"/>
               </a:rPr>
-              <a:t> được</a:t>
-            </a:r>
-            <a:r>
-              <a:rPr lang="en-US" sz="7500" dirty="0" spc="-2" kern="0">
+              <a:t> hỏi,</a:t>
+            </a:r>
+            <a:r>
+              <a:rPr lang="en-US" sz="7500" dirty="0" spc="3" kern="0">
                 <a:solidFill>
                   <a:srgbClr val="14161C"/>
                 </a:solidFill>
@@ -11517,10 +11363,10 @@
                 <a:ea typeface="Bricolage Grotesque ExtraBold" pitchFamily="34" charset="-122"/>
                 <a:cs typeface="Bricolage Grotesque ExtraBold" pitchFamily="34" charset="-120"/>
               </a:rPr>
-              <a:t> hỏi,</a:t>
-            </a:r>
-            <a:r>
-              <a:rPr lang="en-US" sz="7500" dirty="0" spc="2" kern="0">
+              <a:t> chỉ</a:t>
+            </a:r>
+            <a:r>
+              <a:rPr lang="en-US" sz="7500" dirty="0" spc="1" kern="0">
                 <a:solidFill>
                   <a:srgbClr val="14161C"/>
                 </a:solidFill>
@@ -11528,7 +11374,7 @@
                 <a:ea typeface="Bricolage Grotesque ExtraBold" pitchFamily="34" charset="-122"/>
                 <a:cs typeface="Bricolage Grotesque ExtraBold" pitchFamily="34" charset="-120"/>
               </a:rPr>
-              <a:t> chỉ có</a:t>
+              <a:t> có</a:t>
             </a:r>
             <a:r>
               <a:rPr lang="en-US" sz="7500" dirty="0" spc="-35" kern="0">
@@ -14478,6 +14324,103 @@
               <a:t> ·</a:t>
             </a:r>
             <a:r>
+              <a:rPr lang="en-US" sz="1950" dirty="0" spc="0" kern="0">
+                <a:solidFill>
+                  <a:srgbClr val="F3EEE3"/>
+                </a:solidFill>
+                <a:latin typeface="Be Vietnam Pro" pitchFamily="34" charset="0"/>
+                <a:ea typeface="Be Vietnam Pro" pitchFamily="34" charset="-122"/>
+                <a:cs typeface="Be Vietnam Pro" pitchFamily="34" charset="-120"/>
+              </a:rPr>
+              <a:t> PipelineDB:</a:t>
+            </a:r>
+            <a:r>
+              <a:rPr lang="en-US" sz="1950" dirty="0" spc="-2" kern="0">
+                <a:solidFill>
+                  <a:srgbClr val="F3EEE3"/>
+                </a:solidFill>
+                <a:latin typeface="Be Vietnam Pro" pitchFamily="34" charset="0"/>
+                <a:ea typeface="Be Vietnam Pro" pitchFamily="34" charset="-122"/>
+                <a:cs typeface="Be Vietnam Pro" pitchFamily="34" charset="-120"/>
+              </a:rPr>
+              <a:t> README</a:t>
+            </a:r>
+            <a:endParaRPr lang="en-US" sz="1950" dirty="0"/>
+          </a:p>
+          <a:p>
+            <a:pPr algn="l" indent="0" marL="0">
+              <a:lnSpc>
+                <a:spcPts val="2730"/>
+              </a:lnSpc>
+              <a:buNone/>
+            </a:pPr>
+            <a:r>
+              <a:rPr lang="en-US" sz="1950" dirty="0" spc="-12" kern="0">
+                <a:solidFill>
+                  <a:srgbClr val="F3EEE3"/>
+                </a:solidFill>
+                <a:latin typeface="Be Vietnam Pro" pitchFamily="34" charset="0"/>
+                <a:ea typeface="Be Vietnam Pro" pitchFamily="34" charset="-122"/>
+                <a:cs typeface="Be Vietnam Pro" pitchFamily="34" charset="-120"/>
+              </a:rPr>
+              <a:t>PostgreSQL</a:t>
+            </a:r>
+            <a:r>
+              <a:rPr lang="en-US" sz="1950" dirty="0" spc="-1" kern="0">
+                <a:solidFill>
+                  <a:srgbClr val="F3EEE3"/>
+                </a:solidFill>
+                <a:latin typeface="Be Vietnam Pro" pitchFamily="34" charset="0"/>
+                <a:ea typeface="Be Vietnam Pro" pitchFamily="34" charset="-122"/>
+                <a:cs typeface="Be Vietnam Pro" pitchFamily="34" charset="-120"/>
+              </a:rPr>
+              <a:t> 16:</a:t>
+            </a:r>
+            <a:r>
+              <a:rPr lang="en-US" sz="1950" dirty="0" spc="-14" kern="0">
+                <a:solidFill>
+                  <a:srgbClr val="F3EEE3"/>
+                </a:solidFill>
+                <a:latin typeface="Be Vietnam Pro" pitchFamily="34" charset="0"/>
+                <a:ea typeface="Be Vietnam Pro" pitchFamily="34" charset="-122"/>
+                <a:cs typeface="Be Vietnam Pro" pitchFamily="34" charset="-120"/>
+              </a:rPr>
+              <a:t> postgres_fdw;</a:t>
+            </a:r>
+            <a:r>
+              <a:rPr lang="en-US" sz="1950" dirty="0" spc="-4" kern="0">
+                <a:solidFill>
+                  <a:srgbClr val="F3EEE3"/>
+                </a:solidFill>
+                <a:latin typeface="Be Vietnam Pro" pitchFamily="34" charset="0"/>
+                <a:ea typeface="Be Vietnam Pro" pitchFamily="34" charset="-122"/>
+                <a:cs typeface="Be Vietnam Pro" pitchFamily="34" charset="-120"/>
+              </a:rPr>
+              <a:t> Additional</a:t>
+            </a:r>
+            <a:r>
+              <a:rPr lang="en-US" sz="1950" dirty="0" spc="-2" kern="0">
+                <a:solidFill>
+                  <a:srgbClr val="F3EEE3"/>
+                </a:solidFill>
+                <a:latin typeface="Be Vietnam Pro" pitchFamily="34" charset="0"/>
+                <a:ea typeface="Be Vietnam Pro" pitchFamily="34" charset="-122"/>
+                <a:cs typeface="Be Vietnam Pro" pitchFamily="34" charset="-120"/>
+              </a:rPr>
+              <a:t> Supplied</a:t>
+            </a:r>
+            <a:r>
+              <a:rPr lang="en-US" sz="1950" dirty="0" spc="0" kern="0">
+                <a:solidFill>
+                  <a:srgbClr val="F3EEE3"/>
+                </a:solidFill>
+                <a:latin typeface="Be Vietnam Pro" pitchFamily="34" charset="0"/>
+                <a:ea typeface="Be Vietnam Pro" pitchFamily="34" charset="-122"/>
+                <a:cs typeface="Be Vietnam Pro" pitchFamily="34" charset="-120"/>
+              </a:rPr>
+              <a:t> Modules;</a:t>
+            </a:r>
+            <a:r>
               <a:rPr lang="en-US" sz="1950" dirty="0" spc="-11" kern="0">
                 <a:solidFill>
                   <a:srgbClr val="F3EEE3"/>
@@ -14486,72 +14429,6 @@
                 <a:ea typeface="Be Vietnam Pro" pitchFamily="34" charset="-122"/>
                 <a:cs typeface="Be Vietnam Pro" pitchFamily="34" charset="-120"/>
               </a:rPr>
-              <a:t> PostgreSQL</a:t>
-            </a:r>
-            <a:r>
-              <a:rPr lang="en-US" sz="1950" dirty="0" spc="-1" kern="0">
-                <a:solidFill>
-                  <a:srgbClr val="F3EEE3"/>
-                </a:solidFill>
-                <a:latin typeface="Be Vietnam Pro" pitchFamily="34" charset="0"/>
-                <a:ea typeface="Be Vietnam Pro" pitchFamily="34" charset="-122"/>
-                <a:cs typeface="Be Vietnam Pro" pitchFamily="34" charset="-120"/>
-              </a:rPr>
-              <a:t> 16:</a:t>
-            </a:r>
-            <a:r>
-              <a:rPr lang="en-US" sz="1950" dirty="0" spc="-14" kern="0">
-                <a:solidFill>
-                  <a:srgbClr val="F3EEE3"/>
-                </a:solidFill>
-                <a:latin typeface="Be Vietnam Pro" pitchFamily="34" charset="0"/>
-                <a:ea typeface="Be Vietnam Pro" pitchFamily="34" charset="-122"/>
-                <a:cs typeface="Be Vietnam Pro" pitchFamily="34" charset="-120"/>
-              </a:rPr>
-              <a:t> postgres_fdw;</a:t>
-            </a:r>
-            <a:r>
-              <a:rPr lang="en-US" sz="1950" dirty="0" spc="-4" kern="0">
-                <a:solidFill>
-                  <a:srgbClr val="F3EEE3"/>
-                </a:solidFill>
-                <a:latin typeface="Be Vietnam Pro" pitchFamily="34" charset="0"/>
-                <a:ea typeface="Be Vietnam Pro" pitchFamily="34" charset="-122"/>
-                <a:cs typeface="Be Vietnam Pro" pitchFamily="34" charset="-120"/>
-              </a:rPr>
-              <a:t> Additional</a:t>
-            </a:r>
-            <a:r>
-              <a:rPr lang="en-US" sz="1950" dirty="0" spc="-2" kern="0">
-                <a:solidFill>
-                  <a:srgbClr val="F3EEE3"/>
-                </a:solidFill>
-                <a:latin typeface="Be Vietnam Pro" pitchFamily="34" charset="0"/>
-                <a:ea typeface="Be Vietnam Pro" pitchFamily="34" charset="-122"/>
-                <a:cs typeface="Be Vietnam Pro" pitchFamily="34" charset="-120"/>
-              </a:rPr>
-              <a:t> Supplied</a:t>
-            </a:r>
-            <a:r>
-              <a:rPr lang="en-US" sz="1950" dirty="0" spc="0" kern="0">
-                <a:solidFill>
-                  <a:srgbClr val="F3EEE3"/>
-                </a:solidFill>
-                <a:latin typeface="Be Vietnam Pro" pitchFamily="34" charset="0"/>
-                <a:ea typeface="Be Vietnam Pro" pitchFamily="34" charset="-122"/>
-                <a:cs typeface="Be Vietnam Pro" pitchFamily="34" charset="-120"/>
-              </a:rPr>
-              <a:t> Modules;</a:t>
-            </a:r>
-            <a:r>
-              <a:rPr lang="en-US" sz="1950" dirty="0" spc="-11" kern="0">
-                <a:solidFill>
-                  <a:srgbClr val="F3EEE3"/>
-                </a:solidFill>
-                <a:latin typeface="Be Vietnam Pro" pitchFamily="34" charset="0"/>
-                <a:ea typeface="Be Vietnam Pro" pitchFamily="34" charset="-122"/>
-                <a:cs typeface="Be Vietnam Pro" pitchFamily="34" charset="-120"/>
-              </a:rPr>
               <a:t> Database</a:t>
             </a:r>
             <a:r>
@@ -14566,26 +14443,15 @@
               <a:t> Page</a:t>
             </a:r>
             <a:r>
-              <a:rPr lang="en-US" sz="1950" dirty="0" spc="-24" kern="0">
-                <a:solidFill>
-                  <a:srgbClr val="F3EEE3"/>
-                </a:solidFill>
-                <a:latin typeface="Be Vietnam Pro" pitchFamily="34" charset="0"/>
-                <a:ea typeface="Be Vietnam Pro" pitchFamily="34" charset="-122"/>
-                <a:cs typeface="Be Vietnam Pro" pitchFamily="34" charset="-120"/>
-              </a:rPr>
-              <a:t> Layout</a:t>
-            </a:r>
-            <a:r>
-              <a:rPr lang="en-US" sz="1950" dirty="0" spc="-15" kern="0">
-                <a:solidFill>
-                  <a:srgbClr val="F3EEE3"/>
-                </a:solidFill>
-                <a:latin typeface="Be Vietnam Pro" pitchFamily="34" charset="0"/>
-                <a:ea typeface="Be Vietnam Pro" pitchFamily="34" charset="-122"/>
-                <a:cs typeface="Be Vietnam Pro" pitchFamily="34" charset="-120"/>
-              </a:rPr>
-              <a:t> và</a:t>
+              <a:rPr lang="en-US" sz="1950" dirty="0" spc="-21" kern="0">
+                <a:solidFill>
+                  <a:srgbClr val="F3EEE3"/>
+                </a:solidFill>
+                <a:latin typeface="Be Vietnam Pro" pitchFamily="34" charset="0"/>
+                <a:ea typeface="Be Vietnam Pro" pitchFamily="34" charset="-122"/>
+                <a:cs typeface="Be Vietnam Pro" pitchFamily="34" charset="-120"/>
+              </a:rPr>
+              <a:t> Layout,</a:t>
             </a:r>
             <a:r>
               <a:rPr lang="en-US" sz="1950" dirty="0" spc="-48" kern="0">
@@ -14597,39 +14463,6 @@
                 <a:cs typeface="Be Vietnam Pro" pitchFamily="34" charset="-120"/>
               </a:rPr>
               <a:t> TOAST</a:t>
-            </a:r>
-            <a:r>
-              <a:rPr lang="en-US" sz="1950" dirty="0" spc="-2" kern="0">
-                <a:solidFill>
-                  <a:srgbClr val="F3EEE3"/>
-                </a:solidFill>
-                <a:latin typeface="Be Vietnam Pro" pitchFamily="34" charset="0"/>
-                <a:ea typeface="Be Vietnam Pro" pitchFamily="34" charset="-122"/>
-                <a:cs typeface="Be Vietnam Pro" pitchFamily="34" charset="-120"/>
-              </a:rPr>
-              <a:t> ·</a:t>
-            </a:r>
-            <a:r>
-              <a:rPr lang="en-US" sz="1950" dirty="0" spc="0" kern="0">
-                <a:solidFill>
-                  <a:srgbClr val="F3EEE3"/>
-                </a:solidFill>
-                <a:latin typeface="Be Vietnam Pro" pitchFamily="34" charset="0"/>
-                <a:ea typeface="Be Vietnam Pro" pitchFamily="34" charset="-122"/>
-                <a:cs typeface="Be Vietnam Pro" pitchFamily="34" charset="-120"/>
-              </a:rPr>
-              <a:t> PipelineDB:</a:t>
-            </a:r>
-            <a:r>
-              <a:rPr lang="en-US" sz="1950" dirty="0" spc="-2" kern="0">
-                <a:solidFill>
-                  <a:srgbClr val="F3EEE3"/>
-                </a:solidFill>
-                <a:latin typeface="Be Vietnam Pro" pitchFamily="34" charset="0"/>
-                <a:ea typeface="Be Vietnam Pro" pitchFamily="34" charset="-122"/>
-                <a:cs typeface="Be Vietnam Pro" pitchFamily="34" charset="-120"/>
-              </a:rPr>
-              <a:t> README</a:t>
             </a:r>
             <a:endParaRPr lang="en-US" sz="1950" dirty="0"/>
           </a:p>

--- a/system-design-101/vi/lessons/sd-04-029/slides/sd-04-029.pptx
+++ b/system-design-101/vi/lessons/sd-04-029/slides/sd-04-029.pptx
@@ -1701,7 +1701,7 @@
         <p:spPr>
           <a:xfrm>
             <a:off x="914400" y="1428750"/>
-            <a:ext cx="9144000" cy="3238500"/>
+            <a:ext cx="9144000" cy="3333750"/>
           </a:xfrm>
           <a:prstGeom prst="rect">
             <a:avLst/>
@@ -1710,17 +1710,17 @@
           <a:ln/>
         </p:spPr>
         <p:txBody>
-          <a:bodyPr wrap="square" lIns="0" tIns="60552" rIns="0" bIns="-60552" rtlCol="0" anchor="t"/>
+          <a:bodyPr wrap="square" lIns="0" tIns="69437" rIns="0" bIns="-69437" rtlCol="0" anchor="t"/>
           <a:lstStyle/>
           <a:p>
             <a:pPr algn="l" indent="0" marL="0">
               <a:lnSpc>
-                <a:spcPts val="7416"/>
+                <a:spcPts val="8505"/>
               </a:lnSpc>
               <a:buNone/>
             </a:pPr>
             <a:r>
-              <a:rPr lang="en-US" sz="7063" dirty="0" spc="-16" kern="0">
+              <a:rPr lang="en-US" sz="8100" dirty="0" spc="-19" kern="0">
                 <a:solidFill>
                   <a:srgbClr val="F3EEE3"/>
                 </a:solidFill>
@@ -1731,7 +1731,7 @@
               <a:t>PostgreSQL</a:t>
             </a:r>
             <a:r>
-              <a:rPr lang="en-US" sz="7063" dirty="0" spc="-2" kern="0">
+              <a:rPr lang="en-US" sz="8100" dirty="0" spc="-3" kern="0">
                 <a:solidFill>
                   <a:srgbClr val="F3EEE3"/>
                 </a:solidFill>
@@ -1742,7 +1742,7 @@
               <a:t> làm</a:t>
             </a:r>
             <a:r>
-              <a:rPr lang="en-US" sz="7063" dirty="0" spc="-94" kern="0">
+              <a:rPr lang="en-US" sz="8100" dirty="0" spc="-104" kern="0">
                 <a:solidFill>
                   <a:srgbClr val="F3EEE3"/>
                 </a:solidFill>
@@ -1753,7 +1753,7 @@
               <a:t> được</a:t>
             </a:r>
             <a:r>
-              <a:rPr lang="en-US" sz="7063" dirty="0" spc="2" kern="0">
+              <a:rPr lang="en-US" sz="8100" dirty="0" spc="3" kern="0">
                 <a:solidFill>
                   <a:srgbClr val="F3EEE3"/>
                 </a:solidFill>
@@ -1764,7 +1764,7 @@
               <a:t> nhiều</a:t>
             </a:r>
             <a:r>
-              <a:rPr lang="en-US" sz="7063" dirty="0" spc="4" kern="0">
+              <a:rPr lang="en-US" sz="8100" dirty="0" spc="2" kern="0">
                 <a:solidFill>
                   <a:srgbClr val="F3EEE3"/>
                 </a:solidFill>
@@ -1775,7 +1775,7 @@
               <a:t> việc:</a:t>
             </a:r>
             <a:r>
-              <a:rPr lang="en-US" sz="7063" dirty="0" spc="1" kern="0">
+              <a:rPr lang="en-US" sz="8100" dirty="0" spc="0" kern="0">
                 <a:solidFill>
                   <a:srgbClr val="F3EEE3"/>
                 </a:solidFill>
@@ -1786,7 +1786,7 @@
               <a:t> việc</a:t>
             </a:r>
             <a:r>
-              <a:rPr lang="en-US" sz="7063" dirty="0" spc="0" kern="0">
+              <a:rPr lang="en-US" sz="8100" dirty="0" spc="2" kern="0">
                 <a:solidFill>
                   <a:srgbClr val="F3EEE3"/>
                 </a:solidFill>
@@ -1797,7 +1797,7 @@
               <a:t> nào</a:t>
             </a:r>
             <a:r>
-              <a:rPr lang="en-US" sz="7063" dirty="0" spc="-2" kern="0">
+              <a:rPr lang="en-US" sz="8100" dirty="0" spc="1" kern="0">
                 <a:solidFill>
                   <a:srgbClr val="F3EEE3"/>
                 </a:solidFill>
@@ -1808,7 +1808,7 @@
               <a:t> có</a:t>
             </a:r>
             <a:r>
-              <a:rPr lang="en-US" sz="7063" dirty="0" spc="-24" kern="0">
+              <a:rPr lang="en-US" sz="8100" dirty="0" spc="-27" kern="0">
                 <a:solidFill>
                   <a:srgbClr val="F3EEE3"/>
                 </a:solidFill>
@@ -1818,7 +1818,7 @@
               </a:rPr>
               <a:t> sẵn?</a:t>
             </a:r>
-            <a:endParaRPr lang="en-US" sz="7063" dirty="0"/>
+            <a:endParaRPr lang="en-US" sz="8100" dirty="0"/>
           </a:p>
         </p:txBody>
       </p:sp>
@@ -6665,7 +6665,7 @@
               <a:buNone/>
             </a:pPr>
             <a:r>
-              <a:rPr lang="en-US" sz="6600" dirty="0" spc="-146" kern="0">
+              <a:rPr lang="en-US" sz="6900" dirty="0" spc="-155" kern="0">
                 <a:solidFill>
                   <a:srgbClr val="14161C"/>
                 </a:solidFill>
@@ -6676,7 +6676,7 @@
               <a:t>47</a:t>
             </a:r>
             <a:r>
-              <a:rPr lang="en-US" sz="6600" dirty="0" spc="1" kern="0">
+              <a:rPr lang="en-US" sz="6900" dirty="0" spc="5" kern="0">
                 <a:solidFill>
                   <a:srgbClr val="14161C"/>
                 </a:solidFill>
@@ -6687,7 +6687,7 @@
               <a:t> tiện</a:t>
             </a:r>
             <a:r>
-              <a:rPr lang="en-US" sz="6600" dirty="0" spc="-3" kern="0">
+              <a:rPr lang="en-US" sz="6900" dirty="0" spc="0" kern="0">
                 <a:solidFill>
                   <a:srgbClr val="14161C"/>
                 </a:solidFill>
@@ -6698,7 +6698,7 @@
               <a:t> ích</a:t>
             </a:r>
             <a:r>
-              <a:rPr lang="en-US" sz="6600" dirty="0" spc="1" kern="0">
+              <a:rPr lang="en-US" sz="6900" dirty="0" spc="-2" kern="0">
                 <a:solidFill>
                   <a:srgbClr val="14161C"/>
                 </a:solidFill>
@@ -6709,7 +6709,7 @@
               <a:t> có</a:t>
             </a:r>
             <a:r>
-              <a:rPr lang="en-US" sz="6600" dirty="0" spc="-1" kern="0">
+              <a:rPr lang="en-US" sz="6900" dirty="0" spc="0" kern="0">
                 <a:solidFill>
                   <a:srgbClr val="14161C"/>
                 </a:solidFill>
@@ -6720,7 +6720,7 @@
               <a:t> sẵn, không</a:t>
             </a:r>
             <a:r>
-              <a:rPr lang="en-US" sz="6600" dirty="0" spc="0" kern="0">
+              <a:rPr lang="en-US" sz="6900" dirty="0" spc="-1" kern="0">
                 <a:solidFill>
                   <a:srgbClr val="14161C"/>
                 </a:solidFill>
@@ -6731,7 +6731,7 @@
               <a:t> có</a:t>
             </a:r>
             <a:r>
-              <a:rPr lang="en-US" sz="6600" dirty="0" spc="5" kern="0">
+              <a:rPr lang="en-US" sz="6900" dirty="0" spc="8" kern="0">
                 <a:solidFill>
                   <a:srgbClr val="14161C"/>
                 </a:solidFill>
@@ -6742,7 +6742,7 @@
               <a:t> những</a:t>
             </a:r>
             <a:r>
-              <a:rPr lang="en-US" sz="6600" dirty="0" spc="-1" kern="0">
+              <a:rPr lang="en-US" sz="6900" dirty="0" spc="0" kern="0">
                 <a:solidFill>
                   <a:srgbClr val="14161C"/>
                 </a:solidFill>
@@ -6752,7 +6752,7 @@
               </a:rPr>
               <a:t> cái này</a:t>
             </a:r>
-            <a:endParaRPr lang="en-US" sz="6600" dirty="0"/>
+            <a:endParaRPr lang="en-US" sz="6900" dirty="0"/>
           </a:p>
         </p:txBody>
       </p:sp>
@@ -9676,7 +9676,7 @@
               <a:buNone/>
             </a:pPr>
             <a:r>
-              <a:rPr lang="en-US" sz="6600" dirty="0" spc="-2" kern="0">
+              <a:rPr lang="en-US" sz="6900" dirty="0" spc="0" kern="0">
                 <a:solidFill>
                   <a:srgbClr val="14161C"/>
                 </a:solidFill>
@@ -9684,10 +9684,10 @@
                 <a:ea typeface="Bricolage Grotesque ExtraBold" pitchFamily="34" charset="-122"/>
                 <a:cs typeface="Bricolage Grotesque ExtraBold" pitchFamily="34" charset="-120"/>
               </a:rPr>
-              <a:t>Bán</a:t>
-            </a:r>
-            <a:r>
-              <a:rPr lang="en-US" sz="6600" dirty="0" spc="19" kern="0">
+              <a:t>Kho</a:t>
+            </a:r>
+            <a:r>
+              <a:rPr lang="en-US" sz="6900" dirty="0" spc="-12" kern="0">
                 <a:solidFill>
                   <a:srgbClr val="14161C"/>
                 </a:solidFill>
@@ -9695,10 +9695,10 @@
                 <a:ea typeface="Bricolage Grotesque ExtraBold" pitchFamily="34" charset="-122"/>
                 <a:cs typeface="Bricolage Grotesque ExtraBold" pitchFamily="34" charset="-120"/>
               </a:rPr>
-              <a:t> hàng,</a:t>
-            </a:r>
-            <a:r>
-              <a:rPr lang="en-US" sz="6600" dirty="0" spc="0" kern="0">
+              <a:t> trên</a:t>
+            </a:r>
+            <a:r>
+              <a:rPr lang="en-US" sz="6900" dirty="0" spc="-3" kern="0">
                 <a:solidFill>
                   <a:srgbClr val="14161C"/>
                 </a:solidFill>
@@ -9706,10 +9706,10 @@
                 <a:ea typeface="Bricolage Grotesque ExtraBold" pitchFamily="34" charset="-122"/>
                 <a:cs typeface="Bricolage Grotesque ExtraBold" pitchFamily="34" charset="-120"/>
               </a:rPr>
-              <a:t> kho</a:t>
-            </a:r>
-            <a:r>
-              <a:rPr lang="en-US" sz="6600" dirty="0" spc="-13" kern="0">
+              <a:t> bản</a:t>
+            </a:r>
+            <a:r>
+              <a:rPr lang="en-US" sz="6900" dirty="0" spc="9" kern="0">
                 <a:solidFill>
                   <a:srgbClr val="14161C"/>
                 </a:solidFill>
@@ -9717,10 +9717,10 @@
                 <a:ea typeface="Bricolage Grotesque ExtraBold" pitchFamily="34" charset="-122"/>
                 <a:cs typeface="Bricolage Grotesque ExtraBold" pitchFamily="34" charset="-120"/>
               </a:rPr>
-              <a:t> trên</a:t>
-            </a:r>
-            <a:r>
-              <a:rPr lang="en-US" sz="6600" dirty="0" spc="-5" kern="0">
+              <a:t> đồ:</a:t>
+            </a:r>
+            <a:r>
+              <a:rPr lang="en-US" sz="6900" dirty="0" spc="2" kern="0">
                 <a:solidFill>
                   <a:srgbClr val="14161C"/>
                 </a:solidFill>
@@ -9728,10 +9728,10 @@
                 <a:ea typeface="Bricolage Grotesque ExtraBold" pitchFamily="34" charset="-122"/>
                 <a:cs typeface="Bricolage Grotesque ExtraBold" pitchFamily="34" charset="-120"/>
               </a:rPr>
-              <a:t> bản</a:t>
-            </a:r>
-            <a:r>
-              <a:rPr lang="en-US" sz="6600" dirty="0" spc="12" kern="0">
+              <a:t> kiểm</a:t>
+            </a:r>
+            <a:r>
+              <a:rPr lang="en-US" sz="6900" dirty="0" spc="3" kern="0">
                 <a:solidFill>
                   <a:srgbClr val="14161C"/>
                 </a:solidFill>
@@ -9739,10 +9739,10 @@
                 <a:ea typeface="Bricolage Grotesque ExtraBold" pitchFamily="34" charset="-122"/>
                 <a:cs typeface="Bricolage Grotesque ExtraBold" pitchFamily="34" charset="-120"/>
               </a:rPr>
-              <a:t> đồ:</a:t>
-            </a:r>
-            <a:r>
-              <a:rPr lang="en-US" sz="6600" dirty="0" spc="0" kern="0">
+              <a:t> hai</a:t>
+            </a:r>
+            <a:r>
+              <a:rPr lang="en-US" sz="6900" dirty="0" spc="28" kern="0">
                 <a:solidFill>
                   <a:srgbClr val="14161C"/>
                 </a:solidFill>
@@ -9750,10 +9750,10 @@
                 <a:ea typeface="Bricolage Grotesque ExtraBold" pitchFamily="34" charset="-122"/>
                 <a:cs typeface="Bricolage Grotesque ExtraBold" pitchFamily="34" charset="-120"/>
               </a:rPr>
-              <a:t> kiểm</a:t>
-            </a:r>
-            <a:r>
-              <a:rPr lang="en-US" sz="6600" dirty="0" spc="-1" kern="0">
+              <a:t> điều</a:t>
+            </a:r>
+            <a:r>
+              <a:rPr lang="en-US" sz="6900" dirty="0" spc="-22" kern="0">
                 <a:solidFill>
                   <a:srgbClr val="14161C"/>
                 </a:solidFill>
@@ -9761,31 +9761,9 @@
                 <a:ea typeface="Bricolage Grotesque ExtraBold" pitchFamily="34" charset="-122"/>
                 <a:cs typeface="Bricolage Grotesque ExtraBold" pitchFamily="34" charset="-120"/>
               </a:rPr>
-              <a:t> hai</a:t>
-            </a:r>
-            <a:r>
-              <a:rPr lang="en-US" sz="6600" dirty="0" spc="23" kern="0">
-                <a:solidFill>
-                  <a:srgbClr val="14161C"/>
-                </a:solidFill>
-                <a:latin typeface="Bricolage Grotesque ExtraBold" pitchFamily="34" charset="0"/>
-                <a:ea typeface="Bricolage Grotesque ExtraBold" pitchFamily="34" charset="-122"/>
-                <a:cs typeface="Bricolage Grotesque ExtraBold" pitchFamily="34" charset="-120"/>
-              </a:rPr>
-              <a:t> điều</a:t>
-            </a:r>
-            <a:r>
-              <a:rPr lang="en-US" sz="6600" dirty="0" spc="-19" kern="0">
-                <a:solidFill>
-                  <a:srgbClr val="14161C"/>
-                </a:solidFill>
-                <a:latin typeface="Bricolage Grotesque ExtraBold" pitchFamily="34" charset="0"/>
-                <a:ea typeface="Bricolage Grotesque ExtraBold" pitchFamily="34" charset="-122"/>
-                <a:cs typeface="Bricolage Grotesque ExtraBold" pitchFamily="34" charset="-120"/>
-              </a:rPr>
               <a:t> gì?</a:t>
             </a:r>
-            <a:endParaRPr lang="en-US" sz="6600" dirty="0"/>
+            <a:endParaRPr lang="en-US" sz="6900" dirty="0"/>
           </a:p>
         </p:txBody>
       </p:sp>
@@ -12450,7 +12428,7 @@
               <a:buNone/>
             </a:pPr>
             <a:r>
-              <a:rPr lang="en-US" sz="6600" dirty="0" spc="-50" kern="0">
+              <a:rPr lang="en-US" sz="6900" dirty="0" spc="-59" kern="0">
                 <a:solidFill>
                   <a:srgbClr val="F3EEE3"/>
                 </a:solidFill>
@@ -12461,7 +12439,7 @@
               <a:t>Từ</a:t>
             </a:r>
             <a:r>
-              <a:rPr lang="en-US" sz="6600" dirty="0" spc="-1" kern="0">
+              <a:rPr lang="en-US" sz="6900" dirty="0" spc="1" kern="0">
                 <a:solidFill>
                   <a:srgbClr val="F3EEE3"/>
                 </a:solidFill>
@@ -12472,7 +12450,7 @@
               <a:t> viết</a:t>
             </a:r>
             <a:r>
-              <a:rPr lang="en-US" sz="6600" dirty="0" spc="-4" kern="0">
+              <a:rPr lang="en-US" sz="6900" dirty="0" spc="-5" kern="0">
                 <a:solidFill>
                   <a:srgbClr val="F3EEE3"/>
                 </a:solidFill>
@@ -12483,7 +12461,7 @@
               <a:t> tắt</a:t>
             </a:r>
             <a:r>
-              <a:rPr lang="en-US" sz="6600" dirty="0" spc="-71" kern="0">
+              <a:rPr lang="en-US" sz="6900" dirty="0" spc="-76" kern="0">
                 <a:solidFill>
                   <a:srgbClr val="F3EEE3"/>
                 </a:solidFill>
@@ -12494,7 +12472,7 @@
               <a:t> và</a:t>
             </a:r>
             <a:r>
-              <a:rPr lang="en-US" sz="6600" dirty="0" spc="0" kern="0">
+              <a:rPr lang="en-US" sz="6900" dirty="0" spc="2" kern="0">
                 <a:solidFill>
                   <a:srgbClr val="F3EEE3"/>
                 </a:solidFill>
@@ -12505,7 +12483,7 @@
               <a:t> nguồn</a:t>
             </a:r>
             <a:r>
-              <a:rPr lang="en-US" sz="6600" dirty="0" spc="13" kern="0">
+              <a:rPr lang="en-US" sz="6900" dirty="0" spc="13" kern="0">
                 <a:solidFill>
                   <a:srgbClr val="F3EEE3"/>
                 </a:solidFill>
@@ -12516,7 +12494,7 @@
               <a:t> đối</a:t>
             </a:r>
             <a:r>
-              <a:rPr lang="en-US" sz="6600" dirty="0" spc="1" kern="0">
+              <a:rPr lang="en-US" sz="6900" dirty="0" spc="5" kern="0">
                 <a:solidFill>
                   <a:srgbClr val="F3EEE3"/>
                 </a:solidFill>
@@ -12526,7 +12504,7 @@
               </a:rPr>
               <a:t> chiếu</a:t>
             </a:r>
-            <a:endParaRPr lang="en-US" sz="6600" dirty="0"/>
+            <a:endParaRPr lang="en-US" sz="6900" dirty="0"/>
           </a:p>
         </p:txBody>
       </p:sp>
